--- a/slides/decks/s08-acute-gvhd.pptx
+++ b/slides/decks/s08-acute-gvhd.pptx
@@ -134,20 +134,20 @@
   <p:extLst>
     <p:ext uri="{521415D9-36F7-43E2-AB2F-B90AF26B5E84}">
       <p14:sectionLst xmlns:p14="http://schemas.microsoft.com/office/powerpoint/2010/main">
-        <p14:section name="Opening" id="{1c2669eb-6c7b-e29f-9774-768c7374c363}">
+        <p14:section name="Opening" id="{e5b75f27-2f25-cdd3-adb4-0171981ba7f5}">
           <p14:sldIdLst>
             <p14:sldId id="256"/>
             <p14:sldId id="257"/>
           </p14:sldIdLst>
         </p14:section>
-        <p14:section name="Definition" id="{bafe1894-213d-3e37-6ee4-e1f99880e08b}">
+        <p14:section name="Definition" id="{1c6f3585-60e7-a910-aac5-c232870c0995}">
           <p14:sldIdLst>
             <p14:sldId id="258"/>
             <p14:sldId id="259"/>
             <p14:sldId id="260"/>
           </p14:sldIdLst>
         </p14:section>
-        <p14:section name="Diagnosis and grading" id="{7ce0c351-2f3e-63f8-f074-9c3b62022763}">
+        <p14:section name="Diagnosis and grading" id="{970e2e00-15bb-7105-9279-e0cac3db7a65}">
           <p14:sldIdLst>
             <p14:sldId id="261"/>
             <p14:sldId id="262"/>
@@ -155,21 +155,21 @@
             <p14:sldId id="264"/>
           </p14:sldIdLst>
         </p14:section>
-        <p14:section name="Prevention and first-line therapy" id="{d6026771-d766-8fbc-a344-f2a836c17c83}">
+        <p14:section name="Prevention and first-line therapy" id="{cf898cde-9579-491c-2825-373ade715d26}">
           <p14:sldIdLst>
             <p14:sldId id="265"/>
             <p14:sldId id="266"/>
             <p14:sldId id="267"/>
           </p14:sldIdLst>
         </p14:section>
-        <p14:section name="Steroid-refractory aGVHD" id="{1f48f326-1c3d-2899-26d1-d881b21e1b10}">
+        <p14:section name="Steroid-refractory aGVHD" id="{78f2a07d-bfd8-9e9c-7cb6-0394aef67a6e}">
           <p14:sldIdLst>
             <p14:sldId id="268"/>
             <p14:sldId id="269"/>
             <p14:sldId id="270"/>
           </p14:sldIdLst>
         </p14:section>
-        <p14:section name="Board questions" id="{1ef0acb6-2cdd-0818-d7d1-0d944b570aa6}">
+        <p14:section name="Board questions" id="{c2450e11-47ad-b2df-4e91-128df2955a0a}">
           <p14:sldIdLst>
             <p14:sldId id="271"/>
             <p14:sldId id="272"/>
@@ -179,14 +179,14 @@
             <p14:sldId id="276"/>
           </p14:sldIdLst>
         </p14:section>
-        <p14:section name="References" id="{14458ac9-f4d5-308d-9c1a-64526bd32a8d}">
+        <p14:section name="References" id="{0c1dcff1-0c3a-91b3-5eda-feab86be2a73}">
           <p14:sldIdLst>
             <p14:sldId id="277"/>
             <p14:sldId id="278"/>
             <p14:sldId id="279"/>
           </p14:sldIdLst>
         </p14:section>
-        <p14:section name="Backup" id="{786c8cb1-6469-3255-7e28-3b65d96a38d2}">
+        <p14:section name="Backup" id="{6b5ea642-3e7b-a033-dd43-8e8be1f79323}">
           <p14:sldIdLst>
             <p14:sldId id="280"/>
             <p14:sldId id="281"/>
